--- a/军民融合/ppt/research_solutions.pptx
+++ b/军民融合/ppt/research_solutions.pptx
@@ -330,7 +330,25 @@
           <a:bodyPr/>
           <a:lstStyle/>
           <a:p>
-            <a:endParaRPr/>
+            <a:r>
+              <a:rPr lang="zh-CN" altLang="en-US" dirty="0"/>
+              <a:t>核心技术加示意图</a:t>
+            </a:r>
+            <a:endParaRPr lang="en-US" altLang="zh-CN" dirty="0"/>
+          </a:p>
+          <a:p>
+            <a:r>
+              <a:rPr lang="zh-CN" altLang="en-US" dirty="0"/>
+              <a:t>图中海杂波、采集两个框很突兀，直接放到研究内容一的第一个框里，三项研究内容的逻辑关系箭头放在正中间，不要画折线，删掉数据流</a:t>
+            </a:r>
+            <a:endParaRPr lang="en-US" altLang="zh-CN" dirty="0"/>
+          </a:p>
+          <a:p>
+            <a:r>
+              <a:rPr lang="zh-CN" altLang="en-US" dirty="0"/>
+              <a:t>创新点里面的关键词可以放在这张图里</a:t>
+            </a:r>
+            <a:endParaRPr dirty="0"/>
           </a:p>
         </p:txBody>
       </p:sp>
@@ -492,7 +510,7 @@
           <a:p>
             <a:fld id="{EAD68A4E-1AD5-4525-8412-8CB756C9DD23}" type="datetimeFigureOut">
               <a:rPr lang="en-US" altLang="zh-CN" smtClean="0"/>
-              <a:t>2026/6/17</a:t>
+              <a:t>6/17/2026</a:t>
             </a:fld>
             <a:endParaRPr lang="zh-CN" altLang="en-US"/>
           </a:p>
@@ -662,7 +680,7 @@
           <a:p>
             <a:fld id="{EAD68A4E-1AD5-4525-8412-8CB756C9DD23}" type="datetimeFigureOut">
               <a:rPr lang="en-US" altLang="zh-CN" smtClean="0"/>
-              <a:t>2026/6/17</a:t>
+              <a:t>6/17/2026</a:t>
             </a:fld>
             <a:endParaRPr lang="zh-CN" altLang="en-US"/>
           </a:p>
@@ -842,7 +860,7 @@
           <a:p>
             <a:fld id="{EAD68A4E-1AD5-4525-8412-8CB756C9DD23}" type="datetimeFigureOut">
               <a:rPr lang="en-US" altLang="zh-CN" smtClean="0"/>
-              <a:t>2026/6/17</a:t>
+              <a:t>6/17/2026</a:t>
             </a:fld>
             <a:endParaRPr lang="zh-CN" altLang="en-US"/>
           </a:p>
@@ -1012,7 +1030,7 @@
           <a:p>
             <a:fld id="{EAD68A4E-1AD5-4525-8412-8CB756C9DD23}" type="datetimeFigureOut">
               <a:rPr lang="en-US" altLang="zh-CN" smtClean="0"/>
-              <a:t>2026/6/17</a:t>
+              <a:t>6/17/2026</a:t>
             </a:fld>
             <a:endParaRPr lang="zh-CN" altLang="en-US"/>
           </a:p>
@@ -1256,7 +1274,7 @@
           <a:p>
             <a:fld id="{EAD68A4E-1AD5-4525-8412-8CB756C9DD23}" type="datetimeFigureOut">
               <a:rPr lang="en-US" altLang="zh-CN" smtClean="0"/>
-              <a:t>2026/6/17</a:t>
+              <a:t>6/17/2026</a:t>
             </a:fld>
             <a:endParaRPr lang="zh-CN" altLang="en-US"/>
           </a:p>
@@ -1488,7 +1506,7 @@
           <a:p>
             <a:fld id="{EAD68A4E-1AD5-4525-8412-8CB756C9DD23}" type="datetimeFigureOut">
               <a:rPr lang="en-US" altLang="zh-CN" smtClean="0"/>
-              <a:t>2026/6/17</a:t>
+              <a:t>6/17/2026</a:t>
             </a:fld>
             <a:endParaRPr lang="zh-CN" altLang="en-US"/>
           </a:p>
@@ -1855,7 +1873,7 @@
           <a:p>
             <a:fld id="{EAD68A4E-1AD5-4525-8412-8CB756C9DD23}" type="datetimeFigureOut">
               <a:rPr lang="en-US" altLang="zh-CN" smtClean="0"/>
-              <a:t>2026/6/17</a:t>
+              <a:t>6/17/2026</a:t>
             </a:fld>
             <a:endParaRPr lang="zh-CN" altLang="en-US"/>
           </a:p>
@@ -1973,7 +1991,7 @@
           <a:p>
             <a:fld id="{EAD68A4E-1AD5-4525-8412-8CB756C9DD23}" type="datetimeFigureOut">
               <a:rPr lang="en-US" altLang="zh-CN" smtClean="0"/>
-              <a:t>2026/6/17</a:t>
+              <a:t>6/17/2026</a:t>
             </a:fld>
             <a:endParaRPr lang="zh-CN" altLang="en-US"/>
           </a:p>
@@ -2068,7 +2086,7 @@
           <a:p>
             <a:fld id="{EAD68A4E-1AD5-4525-8412-8CB756C9DD23}" type="datetimeFigureOut">
               <a:rPr lang="en-US" altLang="zh-CN" smtClean="0"/>
-              <a:t>2026/6/17</a:t>
+              <a:t>6/17/2026</a:t>
             </a:fld>
             <a:endParaRPr lang="zh-CN" altLang="en-US"/>
           </a:p>
@@ -2345,7 +2363,7 @@
           <a:p>
             <a:fld id="{EAD68A4E-1AD5-4525-8412-8CB756C9DD23}" type="datetimeFigureOut">
               <a:rPr lang="en-US" altLang="zh-CN" smtClean="0"/>
-              <a:t>2026/6/17</a:t>
+              <a:t>6/17/2026</a:t>
             </a:fld>
             <a:endParaRPr lang="zh-CN" altLang="en-US"/>
           </a:p>
@@ -2602,7 +2620,7 @@
           <a:p>
             <a:fld id="{EAD68A4E-1AD5-4525-8412-8CB756C9DD23}" type="datetimeFigureOut">
               <a:rPr lang="en-US" altLang="zh-CN" smtClean="0"/>
-              <a:t>2026/6/17</a:t>
+              <a:t>6/17/2026</a:t>
             </a:fld>
             <a:endParaRPr lang="zh-CN" altLang="en-US"/>
           </a:p>
@@ -2815,7 +2833,7 @@
           <a:p>
             <a:fld id="{EAD68A4E-1AD5-4525-8412-8CB756C9DD23}" type="datetimeFigureOut">
               <a:rPr lang="en-US" altLang="zh-CN" smtClean="0"/>
-              <a:t>2026/6/17</a:t>
+              <a:t>6/17/2026</a:t>
             </a:fld>
             <a:endParaRPr lang="zh-CN" altLang="en-US"/>
           </a:p>
@@ -5028,70 +5046,6 @@
       </p:sp>
       <p:sp>
         <p:nvSpPr>
-          <p:cNvPr id="66" name="矩形: 圆角 1150">
-            <a:extLst>
-              <a:ext uri="{FF2B5EF4-FFF2-40B4-BE49-F238E27FC236}">
-                <a16:creationId xmlns:a16="http://schemas.microsoft.com/office/drawing/2014/main" id="{2738B7C3-2CDF-8374-95E2-9F216F9E4751}"/>
-              </a:ext>
-            </a:extLst>
-          </p:cNvPr>
-          <p:cNvSpPr/>
-          <p:nvPr/>
-        </p:nvSpPr>
-        <p:spPr>
-          <a:xfrm>
-            <a:off x="6186998" y="2930521"/>
-            <a:ext cx="1203425" cy="347678"/>
-          </a:xfrm>
-          <a:prstGeom prst="roundRect">
-            <a:avLst>
-              <a:gd name="adj" fmla="val 4026"/>
-            </a:avLst>
-          </a:prstGeom>
-          <a:solidFill>
-            <a:schemeClr val="bg1"/>
-          </a:solidFill>
-          <a:ln>
-            <a:solidFill>
-              <a:srgbClr val="C00000"/>
-            </a:solidFill>
-          </a:ln>
-        </p:spPr>
-        <p:style>
-          <a:lnRef idx="2">
-            <a:schemeClr val="accent1">
-              <a:shade val="15000"/>
-            </a:schemeClr>
-          </a:lnRef>
-          <a:fillRef idx="1">
-            <a:schemeClr val="accent1"/>
-          </a:fillRef>
-          <a:effectRef idx="0">
-            <a:schemeClr val="accent1"/>
-          </a:effectRef>
-          <a:fontRef idx="minor">
-            <a:schemeClr val="lt1"/>
-          </a:fontRef>
-        </p:style>
-        <p:txBody>
-          <a:bodyPr rtlCol="0" anchor="ctr"/>
-          <a:lstStyle/>
-          <a:p>
-            <a:pPr algn="ctr" rtl="0">
-              <a:defRPr/>
-            </a:pPr>
-            <a:endParaRPr lang="zh-CN" altLang="en-US" sz="2235" dirty="0">
-              <a:solidFill>
-                <a:prstClr val="white"/>
-              </a:solidFill>
-              <a:latin typeface="微软雅黑" panose="020B0503020204020204" pitchFamily="34" charset="-122"/>
-              <a:ea typeface="微软雅黑" panose="020B0503020204020204" pitchFamily="34" charset="-122"/>
-            </a:endParaRPr>
-          </a:p>
-        </p:txBody>
-      </p:sp>
-      <p:sp>
-        <p:nvSpPr>
           <p:cNvPr id="67" name="文本框 66">
             <a:extLst>
               <a:ext uri="{FF2B5EF4-FFF2-40B4-BE49-F238E27FC236}">
@@ -5104,8 +5058,8 @@
         </p:nvSpPr>
         <p:spPr>
           <a:xfrm>
-            <a:off x="6166471" y="2951574"/>
-            <a:ext cx="1203425" cy="338554"/>
+            <a:off x="6849732" y="2727274"/>
+            <a:ext cx="277806" cy="830997"/>
           </a:xfrm>
           <a:prstGeom prst="rect">
             <a:avLst/>
@@ -6642,50 +6596,6 @@
       </p:cxnSp>
       <p:cxnSp>
         <p:nvCxnSpPr>
-          <p:cNvPr id="205" name="直接箭头连接符 204">
-            <a:extLst>
-              <a:ext uri="{FF2B5EF4-FFF2-40B4-BE49-F238E27FC236}">
-                <a16:creationId xmlns:a16="http://schemas.microsoft.com/office/drawing/2014/main" id="{F8370215-830A-E5C7-723A-2ED61A3E172C}"/>
-              </a:ext>
-            </a:extLst>
-          </p:cNvPr>
-          <p:cNvCxnSpPr>
-            <a:cxnSpLocks/>
-          </p:cNvCxnSpPr>
-          <p:nvPr/>
-        </p:nvCxnSpPr>
-        <p:spPr>
-          <a:xfrm>
-            <a:off x="6724656" y="2682100"/>
-            <a:ext cx="0" cy="335213"/>
-          </a:xfrm>
-          <a:prstGeom prst="straightConnector1">
-            <a:avLst/>
-          </a:prstGeom>
-          <a:ln w="38100">
-            <a:solidFill>
-              <a:schemeClr val="tx1"/>
-            </a:solidFill>
-            <a:tailEnd type="triangle"/>
-          </a:ln>
-        </p:spPr>
-        <p:style>
-          <a:lnRef idx="1">
-            <a:schemeClr val="accent1"/>
-          </a:lnRef>
-          <a:fillRef idx="0">
-            <a:schemeClr val="accent1"/>
-          </a:fillRef>
-          <a:effectRef idx="0">
-            <a:schemeClr val="accent1"/>
-          </a:effectRef>
-          <a:fontRef idx="minor">
-            <a:schemeClr val="tx1"/>
-          </a:fontRef>
-        </p:style>
-      </p:cxnSp>
-      <p:cxnSp>
-        <p:nvCxnSpPr>
           <p:cNvPr id="206" name="直接箭头连接符 205">
             <a:extLst>
               <a:ext uri="{FF2B5EF4-FFF2-40B4-BE49-F238E27FC236}">
@@ -6695,13 +6605,14 @@
           </p:cNvPr>
           <p:cNvCxnSpPr>
             <a:cxnSpLocks/>
+            <a:stCxn id="12" idx="2"/>
           </p:cNvCxnSpPr>
           <p:nvPr/>
         </p:nvCxnSpPr>
         <p:spPr>
-          <a:xfrm>
-            <a:off x="6724656" y="3271087"/>
-            <a:ext cx="0" cy="335213"/>
+          <a:xfrm flipH="1">
+            <a:off x="6773584" y="2682100"/>
+            <a:ext cx="5514" cy="900537"/>
           </a:xfrm>
           <a:prstGeom prst="straightConnector1">
             <a:avLst/>

--- a/军民融合/ppt/research_solutions.pptx
+++ b/军民融合/ppt/research_solutions.pptx
@@ -510,7 +510,7 @@
           <a:p>
             <a:fld id="{EAD68A4E-1AD5-4525-8412-8CB756C9DD23}" type="datetimeFigureOut">
               <a:rPr lang="en-US" altLang="zh-CN" smtClean="0"/>
-              <a:t>6/17/2026</a:t>
+              <a:t>6/18/2026</a:t>
             </a:fld>
             <a:endParaRPr lang="zh-CN" altLang="en-US"/>
           </a:p>
@@ -680,7 +680,7 @@
           <a:p>
             <a:fld id="{EAD68A4E-1AD5-4525-8412-8CB756C9DD23}" type="datetimeFigureOut">
               <a:rPr lang="en-US" altLang="zh-CN" smtClean="0"/>
-              <a:t>6/17/2026</a:t>
+              <a:t>6/18/2026</a:t>
             </a:fld>
             <a:endParaRPr lang="zh-CN" altLang="en-US"/>
           </a:p>
@@ -860,7 +860,7 @@
           <a:p>
             <a:fld id="{EAD68A4E-1AD5-4525-8412-8CB756C9DD23}" type="datetimeFigureOut">
               <a:rPr lang="en-US" altLang="zh-CN" smtClean="0"/>
-              <a:t>6/17/2026</a:t>
+              <a:t>6/18/2026</a:t>
             </a:fld>
             <a:endParaRPr lang="zh-CN" altLang="en-US"/>
           </a:p>
@@ -1030,7 +1030,7 @@
           <a:p>
             <a:fld id="{EAD68A4E-1AD5-4525-8412-8CB756C9DD23}" type="datetimeFigureOut">
               <a:rPr lang="en-US" altLang="zh-CN" smtClean="0"/>
-              <a:t>6/17/2026</a:t>
+              <a:t>6/18/2026</a:t>
             </a:fld>
             <a:endParaRPr lang="zh-CN" altLang="en-US"/>
           </a:p>
@@ -1274,7 +1274,7 @@
           <a:p>
             <a:fld id="{EAD68A4E-1AD5-4525-8412-8CB756C9DD23}" type="datetimeFigureOut">
               <a:rPr lang="en-US" altLang="zh-CN" smtClean="0"/>
-              <a:t>6/17/2026</a:t>
+              <a:t>6/18/2026</a:t>
             </a:fld>
             <a:endParaRPr lang="zh-CN" altLang="en-US"/>
           </a:p>
@@ -1506,7 +1506,7 @@
           <a:p>
             <a:fld id="{EAD68A4E-1AD5-4525-8412-8CB756C9DD23}" type="datetimeFigureOut">
               <a:rPr lang="en-US" altLang="zh-CN" smtClean="0"/>
-              <a:t>6/17/2026</a:t>
+              <a:t>6/18/2026</a:t>
             </a:fld>
             <a:endParaRPr lang="zh-CN" altLang="en-US"/>
           </a:p>
@@ -1873,7 +1873,7 @@
           <a:p>
             <a:fld id="{EAD68A4E-1AD5-4525-8412-8CB756C9DD23}" type="datetimeFigureOut">
               <a:rPr lang="en-US" altLang="zh-CN" smtClean="0"/>
-              <a:t>6/17/2026</a:t>
+              <a:t>6/18/2026</a:t>
             </a:fld>
             <a:endParaRPr lang="zh-CN" altLang="en-US"/>
           </a:p>
@@ -1991,7 +1991,7 @@
           <a:p>
             <a:fld id="{EAD68A4E-1AD5-4525-8412-8CB756C9DD23}" type="datetimeFigureOut">
               <a:rPr lang="en-US" altLang="zh-CN" smtClean="0"/>
-              <a:t>6/17/2026</a:t>
+              <a:t>6/18/2026</a:t>
             </a:fld>
             <a:endParaRPr lang="zh-CN" altLang="en-US"/>
           </a:p>
@@ -2086,7 +2086,7 @@
           <a:p>
             <a:fld id="{EAD68A4E-1AD5-4525-8412-8CB756C9DD23}" type="datetimeFigureOut">
               <a:rPr lang="en-US" altLang="zh-CN" smtClean="0"/>
-              <a:t>6/17/2026</a:t>
+              <a:t>6/18/2026</a:t>
             </a:fld>
             <a:endParaRPr lang="zh-CN" altLang="en-US"/>
           </a:p>
@@ -2363,7 +2363,7 @@
           <a:p>
             <a:fld id="{EAD68A4E-1AD5-4525-8412-8CB756C9DD23}" type="datetimeFigureOut">
               <a:rPr lang="en-US" altLang="zh-CN" smtClean="0"/>
-              <a:t>6/17/2026</a:t>
+              <a:t>6/18/2026</a:t>
             </a:fld>
             <a:endParaRPr lang="zh-CN" altLang="en-US"/>
           </a:p>
@@ -2620,7 +2620,7 @@
           <a:p>
             <a:fld id="{EAD68A4E-1AD5-4525-8412-8CB756C9DD23}" type="datetimeFigureOut">
               <a:rPr lang="en-US" altLang="zh-CN" smtClean="0"/>
-              <a:t>6/17/2026</a:t>
+              <a:t>6/18/2026</a:t>
             </a:fld>
             <a:endParaRPr lang="zh-CN" altLang="en-US"/>
           </a:p>
@@ -2833,7 +2833,7 @@
           <a:p>
             <a:fld id="{EAD68A4E-1AD5-4525-8412-8CB756C9DD23}" type="datetimeFigureOut">
               <a:rPr lang="en-US" altLang="zh-CN" smtClean="0"/>
-              <a:t>6/17/2026</a:t>
+              <a:t>6/18/2026</a:t>
             </a:fld>
             <a:endParaRPr lang="zh-CN" altLang="en-US"/>
           </a:p>
@@ -3423,7 +3423,7 @@
         </p:nvGrpSpPr>
         <p:grpSpPr>
           <a:xfrm>
-            <a:off x="503256" y="1026054"/>
+            <a:off x="360138" y="1026054"/>
             <a:ext cx="7514494" cy="1826228"/>
             <a:chOff x="587828" y="999034"/>
             <a:chExt cx="7143117" cy="1817687"/>
@@ -3913,7 +3913,7 @@
         </p:nvGrpSpPr>
         <p:grpSpPr>
           <a:xfrm>
-            <a:off x="552481" y="3438694"/>
+            <a:off x="345752" y="3438694"/>
             <a:ext cx="2296433" cy="1485864"/>
             <a:chOff x="459642" y="1168420"/>
             <a:chExt cx="2630039" cy="1478915"/>
@@ -4053,7 +4053,7 @@
         </p:nvGrpSpPr>
         <p:grpSpPr>
           <a:xfrm>
-            <a:off x="2998435" y="3438694"/>
+            <a:off x="2791706" y="3438694"/>
             <a:ext cx="2316479" cy="1485864"/>
             <a:chOff x="3437706" y="1168420"/>
             <a:chExt cx="2706207" cy="1478915"/>
@@ -4196,7 +4196,7 @@
         </p:nvGrpSpPr>
         <p:grpSpPr>
           <a:xfrm>
-            <a:off x="5455373" y="3438694"/>
+            <a:off x="5248644" y="3438694"/>
             <a:ext cx="2352382" cy="1485864"/>
             <a:chOff x="6499048" y="1168420"/>
             <a:chExt cx="2673099" cy="1478915"/>
@@ -4341,7 +4341,7 @@
         </p:nvGrpSpPr>
         <p:grpSpPr>
           <a:xfrm>
-            <a:off x="2891551" y="5295174"/>
+            <a:off x="2581457" y="5295174"/>
             <a:ext cx="7537462" cy="1826228"/>
             <a:chOff x="565995" y="999034"/>
             <a:chExt cx="7164950" cy="1817687"/>
@@ -5106,7 +5106,7 @@
         </p:nvCxnSpPr>
         <p:spPr>
           <a:xfrm flipV="1">
-            <a:off x="7015108" y="4797178"/>
+            <a:off x="6808379" y="4797178"/>
             <a:ext cx="0" cy="344662"/>
           </a:xfrm>
           <a:prstGeom prst="line">
@@ -5147,7 +5147,7 @@
         </p:nvSpPr>
         <p:spPr>
           <a:xfrm>
-            <a:off x="8178738" y="1034595"/>
+            <a:off x="7948159" y="1034595"/>
             <a:ext cx="2159699" cy="1817687"/>
           </a:xfrm>
           <a:prstGeom prst="roundRect">
@@ -5203,7 +5203,7 @@
         </p:nvSpPr>
         <p:spPr>
           <a:xfrm>
-            <a:off x="8250420" y="1089179"/>
+            <a:off x="8019841" y="1089179"/>
             <a:ext cx="396240" cy="1696961"/>
           </a:xfrm>
           <a:prstGeom prst="roundRect">
@@ -5284,7 +5284,7 @@
         </p:nvGrpSpPr>
         <p:grpSpPr>
           <a:xfrm>
-            <a:off x="8646660" y="1233560"/>
+            <a:off x="8416081" y="1233560"/>
             <a:ext cx="1608132" cy="1478915"/>
             <a:chOff x="1470246" y="1168420"/>
             <a:chExt cx="1937502" cy="1478915"/>
@@ -5480,7 +5480,7 @@
         </p:nvSpPr>
         <p:spPr>
           <a:xfrm>
-            <a:off x="8089057" y="3289083"/>
+            <a:off x="7882328" y="3289083"/>
             <a:ext cx="2159699" cy="1817687"/>
           </a:xfrm>
           <a:prstGeom prst="roundRect">
@@ -5538,7 +5538,7 @@
         </p:nvSpPr>
         <p:spPr>
           <a:xfrm>
-            <a:off x="8160739" y="3286659"/>
+            <a:off x="7954010" y="3286659"/>
             <a:ext cx="396240" cy="1766297"/>
           </a:xfrm>
           <a:prstGeom prst="roundRect">
@@ -5619,7 +5619,7 @@
         </p:nvGrpSpPr>
         <p:grpSpPr>
           <a:xfrm>
-            <a:off x="8556979" y="3488048"/>
+            <a:off x="8350250" y="3488048"/>
             <a:ext cx="1608132" cy="1478915"/>
             <a:chOff x="1470246" y="1168420"/>
             <a:chExt cx="1937502" cy="1478915"/>
@@ -5815,7 +5815,7 @@
         </p:nvSpPr>
         <p:spPr>
           <a:xfrm>
-            <a:off x="678259" y="5295174"/>
+            <a:off x="368165" y="5295174"/>
             <a:ext cx="2159699" cy="1817687"/>
           </a:xfrm>
           <a:prstGeom prst="roundRect">
@@ -5871,7 +5871,7 @@
         </p:nvSpPr>
         <p:spPr>
           <a:xfrm>
-            <a:off x="749941" y="5350724"/>
+            <a:off x="439847" y="5350724"/>
             <a:ext cx="396240" cy="1660195"/>
           </a:xfrm>
           <a:prstGeom prst="roundRect">
@@ -5952,7 +5952,7 @@
         </p:nvGrpSpPr>
         <p:grpSpPr>
           <a:xfrm>
-            <a:off x="1113945" y="5494139"/>
+            <a:off x="803851" y="5494139"/>
             <a:ext cx="1659084" cy="1478915"/>
             <a:chOff x="1431408" y="1168420"/>
             <a:chExt cx="1998890" cy="1478915"/>
@@ -6389,7 +6389,7 @@
         </p:nvCxnSpPr>
         <p:spPr>
           <a:xfrm flipH="1">
-            <a:off x="586614" y="5119468"/>
+            <a:off x="379885" y="5119468"/>
             <a:ext cx="6428494" cy="12420"/>
           </a:xfrm>
           <a:prstGeom prst="line">
@@ -6522,7 +6522,7 @@
         </p:nvCxnSpPr>
         <p:spPr>
           <a:xfrm>
-            <a:off x="2837958" y="1933727"/>
+            <a:off x="2694840" y="1933727"/>
             <a:ext cx="519616" cy="0"/>
           </a:xfrm>
           <a:prstGeom prst="straightConnector1">
@@ -6566,7 +6566,7 @@
         </p:nvCxnSpPr>
         <p:spPr>
           <a:xfrm>
-            <a:off x="5314914" y="1943352"/>
+            <a:off x="5171796" y="1943352"/>
             <a:ext cx="519616" cy="0"/>
           </a:xfrm>
           <a:prstGeom prst="straightConnector1">
@@ -6611,7 +6611,7 @@
         </p:nvCxnSpPr>
         <p:spPr>
           <a:xfrm flipH="1">
-            <a:off x="6773584" y="2682100"/>
+            <a:off x="6630466" y="2682100"/>
             <a:ext cx="5514" cy="900537"/>
           </a:xfrm>
           <a:prstGeom prst="straightConnector1">
@@ -6743,7 +6743,7 @@
         </p:nvCxnSpPr>
         <p:spPr>
           <a:xfrm flipH="1">
-            <a:off x="5314914" y="4195486"/>
+            <a:off x="5108185" y="4195486"/>
             <a:ext cx="519616" cy="0"/>
           </a:xfrm>
           <a:prstGeom prst="straightConnector1">
@@ -6787,7 +6787,7 @@
         </p:nvCxnSpPr>
         <p:spPr>
           <a:xfrm flipH="1">
-            <a:off x="2767158" y="4229353"/>
+            <a:off x="2560429" y="4229353"/>
             <a:ext cx="519616" cy="0"/>
           </a:xfrm>
           <a:prstGeom prst="straightConnector1">
@@ -6831,7 +6831,7 @@
         </p:nvCxnSpPr>
         <p:spPr>
           <a:xfrm flipH="1">
-            <a:off x="7730804" y="6193620"/>
+            <a:off x="7420710" y="6193620"/>
             <a:ext cx="519616" cy="0"/>
           </a:xfrm>
           <a:prstGeom prst="straightConnector1">
@@ -6875,7 +6875,7 @@
         </p:nvCxnSpPr>
         <p:spPr>
           <a:xfrm>
-            <a:off x="5294387" y="6202087"/>
+            <a:off x="4984293" y="6202087"/>
             <a:ext cx="519616" cy="0"/>
           </a:xfrm>
           <a:prstGeom prst="straightConnector1">
@@ -6917,7 +6917,7 @@
         </p:nvSpPr>
         <p:spPr>
           <a:xfrm>
-            <a:off x="931690" y="3914574"/>
+            <a:off x="724961" y="3914574"/>
             <a:ext cx="300210" cy="223913"/>
           </a:xfrm>
           <a:custGeom>
@@ -7044,7 +7044,7 @@
         </p:nvCxnSpPr>
         <p:spPr>
           <a:xfrm flipV="1">
-            <a:off x="599694" y="4024404"/>
+            <a:off x="392965" y="4024404"/>
             <a:ext cx="311544" cy="3"/>
           </a:xfrm>
           <a:prstGeom prst="straightConnector1">
@@ -7086,7 +7086,7 @@
         </p:nvSpPr>
         <p:spPr>
           <a:xfrm>
-            <a:off x="931690" y="3914574"/>
+            <a:off x="724961" y="3914574"/>
             <a:ext cx="1734745" cy="223913"/>
           </a:xfrm>
           <a:prstGeom prst="roundRect">
@@ -7177,7 +7177,7 @@
         </p:nvSpPr>
         <p:spPr>
           <a:xfrm>
-            <a:off x="931690" y="4233371"/>
+            <a:off x="724961" y="4233371"/>
             <a:ext cx="300210" cy="223913"/>
           </a:xfrm>
           <a:custGeom>
@@ -7302,7 +7302,7 @@
         </p:nvSpPr>
         <p:spPr>
           <a:xfrm>
-            <a:off x="931690" y="4233371"/>
+            <a:off x="724961" y="4233371"/>
             <a:ext cx="1734745" cy="223913"/>
           </a:xfrm>
           <a:prstGeom prst="roundRect">
@@ -7393,7 +7393,7 @@
         </p:nvSpPr>
         <p:spPr>
           <a:xfrm>
-            <a:off x="931690" y="4563313"/>
+            <a:off x="724961" y="4563313"/>
             <a:ext cx="300210" cy="223913"/>
           </a:xfrm>
           <a:custGeom>
@@ -7518,7 +7518,7 @@
         </p:nvSpPr>
         <p:spPr>
           <a:xfrm>
-            <a:off x="931690" y="4563313"/>
+            <a:off x="724961" y="4563313"/>
             <a:ext cx="1734745" cy="223913"/>
           </a:xfrm>
           <a:prstGeom prst="roundRect">
@@ -7611,7 +7611,7 @@
         </p:nvCxnSpPr>
         <p:spPr>
           <a:xfrm flipV="1">
-            <a:off x="617737" y="4010325"/>
+            <a:off x="411008" y="4010325"/>
             <a:ext cx="0" cy="1142474"/>
           </a:xfrm>
           <a:prstGeom prst="line">
@@ -7652,7 +7652,7 @@
         </p:nvSpPr>
         <p:spPr>
           <a:xfrm>
-            <a:off x="1382780" y="1630179"/>
+            <a:off x="1239662" y="1630179"/>
             <a:ext cx="620438" cy="937299"/>
           </a:xfrm>
           <a:prstGeom prst="roundRect">
@@ -7743,7 +7743,7 @@
         </p:nvSpPr>
         <p:spPr>
           <a:xfrm>
-            <a:off x="2261263" y="1595654"/>
+            <a:off x="2118145" y="1595654"/>
             <a:ext cx="224854" cy="1001636"/>
           </a:xfrm>
           <a:prstGeom prst="roundRect">
@@ -7836,7 +7836,7 @@
         </p:nvSpPr>
         <p:spPr>
           <a:xfrm>
-            <a:off x="3414604" y="1653521"/>
+            <a:off x="3271486" y="1653521"/>
             <a:ext cx="150921" cy="223913"/>
           </a:xfrm>
           <a:custGeom>
@@ -7961,7 +7961,7 @@
         </p:nvSpPr>
         <p:spPr>
           <a:xfrm>
-            <a:off x="3414604" y="1653521"/>
+            <a:off x="3271486" y="1653521"/>
             <a:ext cx="1734745" cy="223913"/>
           </a:xfrm>
           <a:prstGeom prst="roundRect">
@@ -8052,7 +8052,7 @@
         </p:nvSpPr>
         <p:spPr>
           <a:xfrm>
-            <a:off x="3414604" y="1972318"/>
+            <a:off x="3271486" y="1972318"/>
             <a:ext cx="150921" cy="223913"/>
           </a:xfrm>
           <a:custGeom>
@@ -8177,7 +8177,7 @@
         </p:nvSpPr>
         <p:spPr>
           <a:xfrm>
-            <a:off x="3414604" y="1972318"/>
+            <a:off x="3271486" y="1972318"/>
             <a:ext cx="1734745" cy="223913"/>
           </a:xfrm>
           <a:prstGeom prst="roundRect">
@@ -8268,7 +8268,7 @@
         </p:nvSpPr>
         <p:spPr>
           <a:xfrm>
-            <a:off x="3414604" y="2302260"/>
+            <a:off x="3271486" y="2302260"/>
             <a:ext cx="150921" cy="223913"/>
           </a:xfrm>
           <a:custGeom>
@@ -8393,7 +8393,7 @@
         </p:nvSpPr>
         <p:spPr>
           <a:xfrm>
-            <a:off x="3414604" y="2302260"/>
+            <a:off x="3271486" y="2302260"/>
             <a:ext cx="1734745" cy="223913"/>
           </a:xfrm>
           <a:prstGeom prst="roundRect">
@@ -8484,7 +8484,7 @@
         </p:nvSpPr>
         <p:spPr>
           <a:xfrm>
-            <a:off x="5906212" y="1661902"/>
+            <a:off x="5763094" y="1661902"/>
             <a:ext cx="300210" cy="223913"/>
           </a:xfrm>
           <a:custGeom>
@@ -8609,7 +8609,7 @@
         </p:nvSpPr>
         <p:spPr>
           <a:xfrm>
-            <a:off x="5906212" y="1661902"/>
+            <a:off x="5763094" y="1661902"/>
             <a:ext cx="1734745" cy="223913"/>
           </a:xfrm>
           <a:prstGeom prst="roundRect">
@@ -8700,7 +8700,7 @@
         </p:nvSpPr>
         <p:spPr>
           <a:xfrm>
-            <a:off x="5906212" y="1980699"/>
+            <a:off x="5763094" y="1980699"/>
             <a:ext cx="300210" cy="223913"/>
           </a:xfrm>
           <a:custGeom>
@@ -8825,7 +8825,7 @@
         </p:nvSpPr>
         <p:spPr>
           <a:xfrm>
-            <a:off x="5906212" y="1980699"/>
+            <a:off x="5763094" y="1980699"/>
             <a:ext cx="1734745" cy="223913"/>
           </a:xfrm>
           <a:prstGeom prst="roundRect">
@@ -8916,7 +8916,7 @@
         </p:nvSpPr>
         <p:spPr>
           <a:xfrm>
-            <a:off x="5906212" y="2310641"/>
+            <a:off x="5763094" y="2310641"/>
             <a:ext cx="300210" cy="223913"/>
           </a:xfrm>
           <a:custGeom>
@@ -9041,7 +9041,7 @@
         </p:nvSpPr>
         <p:spPr>
           <a:xfrm>
-            <a:off x="5906212" y="2310641"/>
+            <a:off x="5763094" y="2310641"/>
             <a:ext cx="1734745" cy="223913"/>
           </a:xfrm>
           <a:prstGeom prst="roundRect">
@@ -9132,7 +9132,7 @@
         </p:nvSpPr>
         <p:spPr>
           <a:xfrm>
-            <a:off x="5951214" y="3892482"/>
+            <a:off x="5744485" y="3892482"/>
             <a:ext cx="620438" cy="937299"/>
           </a:xfrm>
           <a:prstGeom prst="roundRect">
@@ -9223,7 +9223,7 @@
         </p:nvSpPr>
         <p:spPr>
           <a:xfrm>
-            <a:off x="6724656" y="3984297"/>
+            <a:off x="6517927" y="3984297"/>
             <a:ext cx="927788" cy="276999"/>
           </a:xfrm>
           <a:prstGeom prst="roundRect">
@@ -9314,7 +9314,7 @@
         </p:nvSpPr>
         <p:spPr>
           <a:xfrm>
-            <a:off x="6713169" y="4489794"/>
+            <a:off x="6506440" y="4489794"/>
             <a:ext cx="927788" cy="276999"/>
           </a:xfrm>
           <a:prstGeom prst="roundRect">
@@ -9405,7 +9405,7 @@
         </p:nvSpPr>
         <p:spPr>
           <a:xfrm>
-            <a:off x="3420200" y="3970978"/>
+            <a:off x="3213471" y="3970978"/>
             <a:ext cx="300210" cy="223913"/>
           </a:xfrm>
           <a:custGeom>
@@ -9530,7 +9530,7 @@
         </p:nvSpPr>
         <p:spPr>
           <a:xfrm>
-            <a:off x="3420200" y="3970978"/>
+            <a:off x="3213471" y="3970978"/>
             <a:ext cx="1734745" cy="223913"/>
           </a:xfrm>
           <a:prstGeom prst="roundRect">
@@ -9621,7 +9621,7 @@
         </p:nvSpPr>
         <p:spPr>
           <a:xfrm>
-            <a:off x="3420200" y="4289775"/>
+            <a:off x="3213471" y="4289775"/>
             <a:ext cx="300210" cy="223913"/>
           </a:xfrm>
           <a:custGeom>
@@ -9746,7 +9746,7 @@
         </p:nvSpPr>
         <p:spPr>
           <a:xfrm>
-            <a:off x="3420200" y="4289775"/>
+            <a:off x="3213471" y="4289775"/>
             <a:ext cx="1734745" cy="223913"/>
           </a:xfrm>
           <a:prstGeom prst="roundRect">
@@ -9837,7 +9837,7 @@
         </p:nvSpPr>
         <p:spPr>
           <a:xfrm>
-            <a:off x="3420200" y="4619717"/>
+            <a:off x="3213471" y="4619717"/>
             <a:ext cx="300210" cy="223913"/>
           </a:xfrm>
           <a:custGeom>
@@ -9962,7 +9962,7 @@
         </p:nvSpPr>
         <p:spPr>
           <a:xfrm>
-            <a:off x="3420200" y="4619717"/>
+            <a:off x="3213471" y="4619717"/>
             <a:ext cx="1734745" cy="223913"/>
           </a:xfrm>
           <a:prstGeom prst="roundRect">
@@ -10053,7 +10053,7 @@
         </p:nvSpPr>
         <p:spPr>
           <a:xfrm>
-            <a:off x="8270432" y="5886854"/>
+            <a:off x="7960338" y="5886854"/>
             <a:ext cx="150921" cy="223913"/>
           </a:xfrm>
           <a:custGeom>
@@ -10178,7 +10178,7 @@
         </p:nvSpPr>
         <p:spPr>
           <a:xfrm>
-            <a:off x="8270432" y="5886854"/>
+            <a:off x="7960338" y="5886854"/>
             <a:ext cx="1734745" cy="223913"/>
           </a:xfrm>
           <a:prstGeom prst="roundRect">
@@ -10269,7 +10269,7 @@
         </p:nvSpPr>
         <p:spPr>
           <a:xfrm>
-            <a:off x="8270432" y="6205651"/>
+            <a:off x="7960338" y="6205651"/>
             <a:ext cx="150921" cy="223913"/>
           </a:xfrm>
           <a:custGeom>
@@ -10394,7 +10394,7 @@
         </p:nvSpPr>
         <p:spPr>
           <a:xfrm>
-            <a:off x="8270432" y="6205651"/>
+            <a:off x="7960338" y="6205651"/>
             <a:ext cx="1734745" cy="223913"/>
           </a:xfrm>
           <a:prstGeom prst="roundRect">
@@ -10485,7 +10485,7 @@
         </p:nvSpPr>
         <p:spPr>
           <a:xfrm>
-            <a:off x="8270432" y="6535593"/>
+            <a:off x="7960338" y="6535593"/>
             <a:ext cx="150921" cy="223913"/>
           </a:xfrm>
           <a:custGeom>
@@ -10610,7 +10610,7 @@
         </p:nvSpPr>
         <p:spPr>
           <a:xfrm>
-            <a:off x="8270432" y="6535593"/>
+            <a:off x="7960338" y="6535593"/>
             <a:ext cx="1734745" cy="223913"/>
           </a:xfrm>
           <a:prstGeom prst="roundRect">
@@ -10701,7 +10701,7 @@
         </p:nvSpPr>
         <p:spPr>
           <a:xfrm>
-            <a:off x="5951214" y="5925249"/>
+            <a:off x="5641120" y="5925249"/>
             <a:ext cx="150921" cy="223913"/>
           </a:xfrm>
           <a:custGeom>
@@ -10826,7 +10826,7 @@
         </p:nvSpPr>
         <p:spPr>
           <a:xfrm>
-            <a:off x="5951214" y="5925249"/>
+            <a:off x="5641120" y="5925249"/>
             <a:ext cx="1734745" cy="223913"/>
           </a:xfrm>
           <a:prstGeom prst="roundRect">
@@ -10917,7 +10917,7 @@
         </p:nvSpPr>
         <p:spPr>
           <a:xfrm>
-            <a:off x="5951214" y="6244046"/>
+            <a:off x="5641120" y="6244046"/>
             <a:ext cx="150921" cy="223913"/>
           </a:xfrm>
           <a:custGeom>
@@ -11042,7 +11042,7 @@
         </p:nvSpPr>
         <p:spPr>
           <a:xfrm>
-            <a:off x="5951214" y="6244046"/>
+            <a:off x="5641120" y="6244046"/>
             <a:ext cx="1734745" cy="223913"/>
           </a:xfrm>
           <a:prstGeom prst="roundRect">
@@ -11133,7 +11133,7 @@
         </p:nvSpPr>
         <p:spPr>
           <a:xfrm>
-            <a:off x="5951214" y="6573988"/>
+            <a:off x="5641120" y="6573988"/>
             <a:ext cx="150921" cy="223913"/>
           </a:xfrm>
           <a:custGeom>
@@ -11258,7 +11258,7 @@
         </p:nvSpPr>
         <p:spPr>
           <a:xfrm>
-            <a:off x="5951214" y="6573988"/>
+            <a:off x="5641120" y="6573988"/>
             <a:ext cx="1734745" cy="223913"/>
           </a:xfrm>
           <a:prstGeom prst="roundRect">
@@ -11349,7 +11349,7 @@
         </p:nvSpPr>
         <p:spPr>
           <a:xfrm>
-            <a:off x="4090736" y="5860958"/>
+            <a:off x="3780642" y="5860958"/>
             <a:ext cx="469827" cy="967111"/>
           </a:xfrm>
           <a:prstGeom prst="roundRect">
@@ -11464,7 +11464,7 @@
         </p:nvSpPr>
         <p:spPr>
           <a:xfrm>
-            <a:off x="4722359" y="5826433"/>
+            <a:off x="4412265" y="5826433"/>
             <a:ext cx="519616" cy="1001636"/>
           </a:xfrm>
           <a:prstGeom prst="roundRect">
@@ -11557,7 +11557,7 @@
         </p:nvSpPr>
         <p:spPr>
           <a:xfrm>
-            <a:off x="3441668" y="5860958"/>
+            <a:off x="3131574" y="5860958"/>
             <a:ext cx="469827" cy="967111"/>
           </a:xfrm>
           <a:prstGeom prst="roundRect">
@@ -11648,7 +11648,7 @@
         </p:nvSpPr>
         <p:spPr>
           <a:xfrm>
-            <a:off x="3490064" y="6791978"/>
+            <a:off x="3179970" y="6791978"/>
             <a:ext cx="1639263" cy="206488"/>
           </a:xfrm>
           <a:prstGeom prst="rect">
@@ -11769,99 +11769,249 @@
           </a:p>
         </p:txBody>
       </p:sp>
-      <p:pic>
-        <p:nvPicPr>
-          <p:cNvPr id="521" name="图片 520">
+      <p:sp>
+        <p:nvSpPr>
+          <p:cNvPr id="7" name="矩形: 圆角 1197">
             <a:extLst>
               <a:ext uri="{FF2B5EF4-FFF2-40B4-BE49-F238E27FC236}">
-                <a16:creationId xmlns:a16="http://schemas.microsoft.com/office/drawing/2014/main" id="{47403C7F-FD82-4EC7-86C9-CAA833525E93}"/>
+                <a16:creationId xmlns:a16="http://schemas.microsoft.com/office/drawing/2014/main" id="{A705FB52-3156-0C4A-3492-D35900C9994E}"/>
               </a:ext>
             </a:extLst>
           </p:cNvPr>
-          <p:cNvPicPr>
-            <a:picLocks noChangeAspect="1"/>
-          </p:cNvPicPr>
+          <p:cNvSpPr/>
           <p:nvPr/>
-        </p:nvPicPr>
-        <p:blipFill>
-          <a:blip r:embed="rId3"/>
-          <a:srcRect l="-2505" t="66252"/>
-          <a:stretch>
-            <a:fillRect/>
-          </a:stretch>
-        </p:blipFill>
+        </p:nvSpPr>
         <p:spPr>
           <a:xfrm>
-            <a:off x="10309093" y="807350"/>
-            <a:ext cx="722505" cy="2156929"/>
+            <a:off x="9942197" y="1083405"/>
+            <a:ext cx="396240" cy="1696961"/>
           </a:xfrm>
-          <a:prstGeom prst="rect">
-            <a:avLst/>
+          <a:prstGeom prst="roundRect">
+            <a:avLst>
+              <a:gd name="adj" fmla="val 0"/>
+            </a:avLst>
           </a:prstGeom>
+          <a:solidFill>
+            <a:srgbClr val="C00000"/>
+          </a:solidFill>
+          <a:ln>
+            <a:noFill/>
+          </a:ln>
         </p:spPr>
-      </p:pic>
-      <p:pic>
-        <p:nvPicPr>
-          <p:cNvPr id="522" name="图片 521">
+        <p:style>
+          <a:lnRef idx="2">
+            <a:schemeClr val="accent1">
+              <a:shade val="15000"/>
+            </a:schemeClr>
+          </a:lnRef>
+          <a:fillRef idx="1">
+            <a:schemeClr val="accent1"/>
+          </a:fillRef>
+          <a:effectRef idx="0">
+            <a:schemeClr val="accent1"/>
+          </a:effectRef>
+          <a:fontRef idx="minor">
+            <a:schemeClr val="lt1"/>
+          </a:fontRef>
+        </p:style>
+        <p:txBody>
+          <a:bodyPr rtlCol="0" anchor="ctr"/>
+          <a:lstStyle/>
+          <a:p>
+            <a:pPr algn="ctr">
+              <a:lnSpc>
+                <a:spcPct val="85000"/>
+              </a:lnSpc>
+              <a:spcBef>
+                <a:spcPts val="0"/>
+              </a:spcBef>
+              <a:spcAft>
+                <a:spcPts val="0"/>
+              </a:spcAft>
+            </a:pPr>
+            <a:r>
+              <a:rPr kumimoji="0" lang="zh-CN" altLang="en-US" sz="1700" b="1" i="0" u="none" strike="noStrike" kern="1200" cap="none" spc="-200" normalizeH="0" baseline="0" noProof="0" dirty="0">
+                <a:ln>
+                  <a:noFill/>
+                </a:ln>
+                <a:solidFill>
+                  <a:schemeClr val="bg1"/>
+                </a:solidFill>
+                <a:effectLst/>
+                <a:uLnTx/>
+                <a:uFillTx/>
+                <a:latin typeface="微软雅黑" panose="020B0503020204020204" pitchFamily="34" charset="-122"/>
+                <a:ea typeface="微软雅黑" panose="020B0503020204020204" pitchFamily="34" charset="-122"/>
+                <a:cs typeface="+mn-cs"/>
+                <a:sym typeface="+mn-ea"/>
+              </a:rPr>
+              <a:t>怎么提取</a:t>
+            </a:r>
+          </a:p>
+        </p:txBody>
+      </p:sp>
+      <p:sp>
+        <p:nvSpPr>
+          <p:cNvPr id="8" name="矩形: 圆角 1197">
             <a:extLst>
               <a:ext uri="{FF2B5EF4-FFF2-40B4-BE49-F238E27FC236}">
-                <a16:creationId xmlns:a16="http://schemas.microsoft.com/office/drawing/2014/main" id="{E55FDB0A-BD1C-E6DA-B97A-8D49FE41AE30}"/>
+                <a16:creationId xmlns:a16="http://schemas.microsoft.com/office/drawing/2014/main" id="{19319065-F6E3-94E6-1E41-9B90460A073A}"/>
               </a:ext>
             </a:extLst>
           </p:cNvPr>
-          <p:cNvPicPr>
-            <a:picLocks noChangeAspect="1"/>
-          </p:cNvPicPr>
+          <p:cNvSpPr/>
           <p:nvPr/>
-        </p:nvPicPr>
-        <p:blipFill>
-          <a:blip r:embed="rId3"/>
-          <a:srcRect l="750" t="31922" r="1323" b="35783"/>
-          <a:stretch>
-            <a:fillRect/>
-          </a:stretch>
-        </p:blipFill>
+        </p:nvSpPr>
         <p:spPr>
           <a:xfrm>
-            <a:off x="10319471" y="3067855"/>
-            <a:ext cx="690246" cy="2064065"/>
+            <a:off x="9940803" y="3346410"/>
+            <a:ext cx="396240" cy="1696961"/>
           </a:xfrm>
-          <a:prstGeom prst="rect">
-            <a:avLst/>
+          <a:prstGeom prst="roundRect">
+            <a:avLst>
+              <a:gd name="adj" fmla="val 0"/>
+            </a:avLst>
           </a:prstGeom>
+          <a:solidFill>
+            <a:srgbClr val="2E54A1"/>
+          </a:solidFill>
+          <a:ln>
+            <a:noFill/>
+          </a:ln>
         </p:spPr>
-      </p:pic>
-      <p:pic>
-        <p:nvPicPr>
-          <p:cNvPr id="523" name="图片 522">
+        <p:style>
+          <a:lnRef idx="2">
+            <a:schemeClr val="accent1">
+              <a:shade val="15000"/>
+            </a:schemeClr>
+          </a:lnRef>
+          <a:fillRef idx="1">
+            <a:schemeClr val="accent1"/>
+          </a:fillRef>
+          <a:effectRef idx="0">
+            <a:schemeClr val="accent1"/>
+          </a:effectRef>
+          <a:fontRef idx="minor">
+            <a:schemeClr val="lt1"/>
+          </a:fontRef>
+        </p:style>
+        <p:txBody>
+          <a:bodyPr rtlCol="0" anchor="ctr"/>
+          <a:lstStyle/>
+          <a:p>
+            <a:pPr algn="ctr">
+              <a:lnSpc>
+                <a:spcPct val="85000"/>
+              </a:lnSpc>
+              <a:spcBef>
+                <a:spcPts val="0"/>
+              </a:spcBef>
+              <a:spcAft>
+                <a:spcPts val="0"/>
+              </a:spcAft>
+            </a:pPr>
+            <a:r>
+              <a:rPr kumimoji="0" lang="zh-CN" altLang="en-US" sz="1700" b="1" i="0" u="none" strike="noStrike" kern="1200" cap="none" spc="-200" normalizeH="0" baseline="0" noProof="0" dirty="0">
+                <a:ln>
+                  <a:noFill/>
+                </a:ln>
+                <a:solidFill>
+                  <a:schemeClr val="bg1"/>
+                </a:solidFill>
+                <a:effectLst/>
+                <a:uLnTx/>
+                <a:uFillTx/>
+                <a:latin typeface="微软雅黑" panose="020B0503020204020204" pitchFamily="34" charset="-122"/>
+                <a:ea typeface="微软雅黑" panose="020B0503020204020204" pitchFamily="34" charset="-122"/>
+                <a:cs typeface="+mn-cs"/>
+                <a:sym typeface="+mn-ea"/>
+              </a:rPr>
+              <a:t>怎么存储</a:t>
+            </a:r>
+          </a:p>
+        </p:txBody>
+      </p:sp>
+      <p:sp>
+        <p:nvSpPr>
+          <p:cNvPr id="9" name="矩形: 圆角 1197">
             <a:extLst>
               <a:ext uri="{FF2B5EF4-FFF2-40B4-BE49-F238E27FC236}">
-                <a16:creationId xmlns:a16="http://schemas.microsoft.com/office/drawing/2014/main" id="{767340DE-3EF8-49F3-3E3C-4F359ADC82A8}"/>
+                <a16:creationId xmlns:a16="http://schemas.microsoft.com/office/drawing/2014/main" id="{5B13FAA9-FC6E-5892-DBF3-FA0535DBCFF2}"/>
               </a:ext>
             </a:extLst>
           </p:cNvPr>
-          <p:cNvPicPr>
-            <a:picLocks noChangeAspect="1"/>
-          </p:cNvPicPr>
+          <p:cNvSpPr/>
           <p:nvPr/>
-        </p:nvPicPr>
-        <p:blipFill>
-          <a:blip r:embed="rId3"/>
-          <a:srcRect l="17747" t="1411" r="-5462" b="70963"/>
-          <a:stretch>
-            <a:fillRect/>
-          </a:stretch>
-        </p:blipFill>
+        </p:nvSpPr>
         <p:spPr>
           <a:xfrm>
-            <a:off x="10454005" y="5266326"/>
-            <a:ext cx="618256" cy="1765671"/>
+            <a:off x="9942197" y="5395565"/>
+            <a:ext cx="396240" cy="1696961"/>
           </a:xfrm>
-          <a:prstGeom prst="rect">
-            <a:avLst/>
+          <a:prstGeom prst="roundRect">
+            <a:avLst>
+              <a:gd name="adj" fmla="val 0"/>
+            </a:avLst>
           </a:prstGeom>
+          <a:solidFill>
+            <a:srgbClr val="C00000"/>
+          </a:solidFill>
+          <a:ln>
+            <a:noFill/>
+          </a:ln>
         </p:spPr>
-      </p:pic>
+        <p:style>
+          <a:lnRef idx="2">
+            <a:schemeClr val="accent1">
+              <a:shade val="15000"/>
+            </a:schemeClr>
+          </a:lnRef>
+          <a:fillRef idx="1">
+            <a:schemeClr val="accent1"/>
+          </a:fillRef>
+          <a:effectRef idx="0">
+            <a:schemeClr val="accent1"/>
+          </a:effectRef>
+          <a:fontRef idx="minor">
+            <a:schemeClr val="lt1"/>
+          </a:fontRef>
+        </p:style>
+        <p:txBody>
+          <a:bodyPr rtlCol="0" anchor="ctr"/>
+          <a:lstStyle/>
+          <a:p>
+            <a:pPr algn="ctr">
+              <a:lnSpc>
+                <a:spcPct val="85000"/>
+              </a:lnSpc>
+              <a:spcBef>
+                <a:spcPts val="0"/>
+              </a:spcBef>
+              <a:spcAft>
+                <a:spcPts val="0"/>
+              </a:spcAft>
+            </a:pPr>
+            <a:r>
+              <a:rPr kumimoji="0" lang="zh-CN" altLang="en-US" sz="1700" b="1" i="0" u="none" strike="noStrike" kern="1200" cap="none" spc="-200" normalizeH="0" baseline="0" noProof="0" dirty="0">
+                <a:ln>
+                  <a:noFill/>
+                </a:ln>
+                <a:solidFill>
+                  <a:schemeClr val="bg1"/>
+                </a:solidFill>
+                <a:effectLst/>
+                <a:uLnTx/>
+                <a:uFillTx/>
+                <a:latin typeface="微软雅黑" panose="020B0503020204020204" pitchFamily="34" charset="-122"/>
+                <a:ea typeface="微软雅黑" panose="020B0503020204020204" pitchFamily="34" charset="-122"/>
+                <a:cs typeface="+mn-cs"/>
+                <a:sym typeface="+mn-ea"/>
+              </a:rPr>
+              <a:t>怎么处理</a:t>
+            </a:r>
+          </a:p>
+        </p:txBody>
+      </p:sp>
     </p:spTree>
   </p:cSld>
   <p:clrMapOvr>

--- a/军民融合/ppt/research_solutions.pptx
+++ b/军民融合/ppt/research_solutions.pptx
@@ -510,7 +510,7 @@
           <a:p>
             <a:fld id="{EAD68A4E-1AD5-4525-8412-8CB756C9DD23}" type="datetimeFigureOut">
               <a:rPr lang="en-US" altLang="zh-CN" smtClean="0"/>
-              <a:t>6/18/2026</a:t>
+              <a:t>6/22/2026</a:t>
             </a:fld>
             <a:endParaRPr lang="zh-CN" altLang="en-US"/>
           </a:p>
@@ -675,7 +675,7 @@
           <a:p>
             <a:fld id="{EAD68A4E-1AD5-4525-8412-8CB756C9DD23}" type="datetimeFigureOut">
               <a:rPr lang="en-US" altLang="zh-CN" smtClean="0"/>
-              <a:t>6/18/2026</a:t>
+              <a:t>6/22/2026</a:t>
             </a:fld>
             <a:endParaRPr lang="zh-CN" altLang="en-US"/>
           </a:p>
@@ -850,7 +850,7 @@
           <a:p>
             <a:fld id="{EAD68A4E-1AD5-4525-8412-8CB756C9DD23}" type="datetimeFigureOut">
               <a:rPr lang="en-US" altLang="zh-CN" smtClean="0"/>
-              <a:t>6/18/2026</a:t>
+              <a:t>6/22/2026</a:t>
             </a:fld>
             <a:endParaRPr lang="zh-CN" altLang="en-US"/>
           </a:p>
@@ -1015,7 +1015,7 @@
           <a:p>
             <a:fld id="{EAD68A4E-1AD5-4525-8412-8CB756C9DD23}" type="datetimeFigureOut">
               <a:rPr lang="en-US" altLang="zh-CN" smtClean="0"/>
-              <a:t>6/18/2026</a:t>
+              <a:t>6/22/2026</a:t>
             </a:fld>
             <a:endParaRPr lang="zh-CN" altLang="en-US"/>
           </a:p>
@@ -1254,7 +1254,7 @@
           <a:p>
             <a:fld id="{EAD68A4E-1AD5-4525-8412-8CB756C9DD23}" type="datetimeFigureOut">
               <a:rPr lang="en-US" altLang="zh-CN" smtClean="0"/>
-              <a:t>6/18/2026</a:t>
+              <a:t>6/22/2026</a:t>
             </a:fld>
             <a:endParaRPr lang="zh-CN" altLang="en-US"/>
           </a:p>
@@ -1481,7 +1481,7 @@
           <a:p>
             <a:fld id="{EAD68A4E-1AD5-4525-8412-8CB756C9DD23}" type="datetimeFigureOut">
               <a:rPr lang="en-US" altLang="zh-CN" smtClean="0"/>
-              <a:t>6/18/2026</a:t>
+              <a:t>6/22/2026</a:t>
             </a:fld>
             <a:endParaRPr lang="zh-CN" altLang="en-US"/>
           </a:p>
@@ -1843,7 +1843,7 @@
           <a:p>
             <a:fld id="{EAD68A4E-1AD5-4525-8412-8CB756C9DD23}" type="datetimeFigureOut">
               <a:rPr lang="en-US" altLang="zh-CN" smtClean="0"/>
-              <a:t>6/18/2026</a:t>
+              <a:t>6/22/2026</a:t>
             </a:fld>
             <a:endParaRPr lang="zh-CN" altLang="en-US"/>
           </a:p>
@@ -1956,7 +1956,7 @@
           <a:p>
             <a:fld id="{EAD68A4E-1AD5-4525-8412-8CB756C9DD23}" type="datetimeFigureOut">
               <a:rPr lang="en-US" altLang="zh-CN" smtClean="0"/>
-              <a:t>6/18/2026</a:t>
+              <a:t>6/22/2026</a:t>
             </a:fld>
             <a:endParaRPr lang="zh-CN" altLang="en-US"/>
           </a:p>
@@ -2046,7 +2046,7 @@
           <a:p>
             <a:fld id="{EAD68A4E-1AD5-4525-8412-8CB756C9DD23}" type="datetimeFigureOut">
               <a:rPr lang="en-US" altLang="zh-CN" smtClean="0"/>
-              <a:t>6/18/2026</a:t>
+              <a:t>6/22/2026</a:t>
             </a:fld>
             <a:endParaRPr lang="zh-CN" altLang="en-US"/>
           </a:p>
@@ -2318,7 +2318,7 @@
           <a:p>
             <a:fld id="{EAD68A4E-1AD5-4525-8412-8CB756C9DD23}" type="datetimeFigureOut">
               <a:rPr lang="en-US" altLang="zh-CN" smtClean="0"/>
-              <a:t>6/18/2026</a:t>
+              <a:t>6/22/2026</a:t>
             </a:fld>
             <a:endParaRPr lang="zh-CN" altLang="en-US"/>
           </a:p>
@@ -2570,7 +2570,7 @@
           <a:p>
             <a:fld id="{EAD68A4E-1AD5-4525-8412-8CB756C9DD23}" type="datetimeFigureOut">
               <a:rPr lang="en-US" altLang="zh-CN" smtClean="0"/>
-              <a:t>6/18/2026</a:t>
+              <a:t>6/22/2026</a:t>
             </a:fld>
             <a:endParaRPr lang="zh-CN" altLang="en-US"/>
           </a:p>
@@ -2778,7 +2778,7 @@
           <a:p>
             <a:fld id="{EAD68A4E-1AD5-4525-8412-8CB756C9DD23}" type="datetimeFigureOut">
               <a:rPr lang="en-US" altLang="zh-CN" smtClean="0"/>
-              <a:t>6/18/2026</a:t>
+              <a:t>6/22/2026</a:t>
             </a:fld>
             <a:endParaRPr lang="zh-CN" altLang="en-US"/>
           </a:p>
@@ -3529,10 +3529,10 @@
           </p:nvGrpSpPr>
           <p:grpSpPr>
             <a:xfrm>
-              <a:off x="634620" y="1168420"/>
-              <a:ext cx="2454590" cy="1478915"/>
-              <a:chOff x="459642" y="1168420"/>
-              <a:chExt cx="2957327" cy="1478915"/>
+              <a:off x="634620" y="1101095"/>
+              <a:ext cx="2454590" cy="1546240"/>
+              <a:chOff x="459642" y="1101095"/>
+              <a:chExt cx="2957327" cy="1546240"/>
             </a:xfrm>
           </p:grpSpPr>
           <p:sp>
@@ -3605,8 +3605,8 @@
             </p:nvSpPr>
             <p:spPr>
               <a:xfrm>
-                <a:off x="459642" y="1295436"/>
-                <a:ext cx="2957327" cy="274301"/>
+                <a:off x="459642" y="1101095"/>
+                <a:ext cx="2957327" cy="459477"/>
               </a:xfrm>
               <a:prstGeom prst="rect">
                 <a:avLst/>
@@ -3629,14 +3629,14 @@
                     <a:latin typeface="微软雅黑" panose="020B0503020204020204" charset="-122"/>
                     <a:ea typeface="微软雅黑" panose="020B0503020204020204" charset="-122"/>
                   </a:rPr>
-                  <a:t>1.1</a:t>
+                  <a:t>1.1 </a:t>
                 </a:r>
                 <a:r>
                   <a:rPr lang="zh-CN" altLang="en-US" sz="1200" b="1" dirty="0">
                     <a:latin typeface="微软雅黑" panose="020B0503020204020204" charset="-122"/>
                     <a:ea typeface="微软雅黑" panose="020B0503020204020204" charset="-122"/>
                   </a:rPr>
-                  <a:t>电磁信号时空耦合规律建模</a:t>
+                  <a:t>复杂海洋环境下电磁频谱信号时空耦合规律建模</a:t>
                 </a:r>
               </a:p>
             </p:txBody>
@@ -3652,10 +3652,10 @@
           </p:nvGrpSpPr>
           <p:grpSpPr>
             <a:xfrm>
-              <a:off x="3139796" y="1168420"/>
-              <a:ext cx="2021891" cy="1478915"/>
-              <a:chOff x="3659048" y="1168420"/>
-              <a:chExt cx="2484862" cy="1478915"/>
+              <a:off x="3139796" y="1161419"/>
+              <a:ext cx="2021891" cy="1485916"/>
+              <a:chOff x="3659048" y="1161419"/>
+              <a:chExt cx="2484862" cy="1485916"/>
             </a:xfrm>
           </p:grpSpPr>
           <p:sp>
@@ -3728,8 +3728,8 @@
             </p:nvSpPr>
             <p:spPr>
               <a:xfrm>
-                <a:off x="3659048" y="1294140"/>
-                <a:ext cx="2460882" cy="275686"/>
+                <a:off x="3659048" y="1161419"/>
+                <a:ext cx="2460882" cy="459477"/>
               </a:xfrm>
               <a:prstGeom prst="rect">
                 <a:avLst/>
@@ -3755,7 +3755,7 @@
                     <a:latin typeface="微软雅黑" panose="020B0503020204020204" charset="-122"/>
                     <a:ea typeface="微软雅黑" panose="020B0503020204020204" charset="-122"/>
                   </a:rPr>
-                  <a:t>微弱信号频谱特征增强</a:t>
+                  <a:t>基于干扰对消的微弱信号频谱特征增强方法</a:t>
                 </a:r>
                 <a:endParaRPr lang="zh-CN" altLang="en-US" sz="1200" b="1" dirty="0">
                   <a:solidFill>
@@ -3778,10 +3778,10 @@
           </p:nvGrpSpPr>
           <p:grpSpPr>
             <a:xfrm>
-              <a:off x="5295205" y="1168420"/>
-              <a:ext cx="2236124" cy="1478915"/>
-              <a:chOff x="6499048" y="1168420"/>
-              <a:chExt cx="2673099" cy="1478915"/>
+              <a:off x="5539663" y="1168420"/>
+              <a:ext cx="1991666" cy="1478915"/>
+              <a:chOff x="6791278" y="1168420"/>
+              <a:chExt cx="2380869" cy="1478915"/>
             </a:xfrm>
           </p:grpSpPr>
           <p:sp>
@@ -3854,8 +3854,8 @@
             </p:nvSpPr>
             <p:spPr>
               <a:xfrm>
-                <a:off x="6499048" y="1335217"/>
-                <a:ext cx="2259037" cy="274301"/>
+                <a:off x="6791278" y="1183531"/>
+                <a:ext cx="2259038" cy="459477"/>
               </a:xfrm>
               <a:prstGeom prst="rect">
                 <a:avLst/>
@@ -3881,7 +3881,7 @@
                     <a:latin typeface="微软雅黑" panose="020B0503020204020204" charset="-122"/>
                     <a:ea typeface="微软雅黑" panose="020B0503020204020204" charset="-122"/>
                   </a:rPr>
-                  <a:t>多维表征提取</a:t>
+                  <a:t>面向微弱电磁信号的多维表征提取方法</a:t>
                 </a:r>
                 <a:endParaRPr lang="zh-CN" altLang="en-US" sz="1200" b="1" dirty="0">
                   <a:solidFill>
@@ -4102,7 +4102,7 @@
                 <a:latin typeface="微软雅黑" panose="020B0503020204020204" charset="-122"/>
                 <a:ea typeface="微软雅黑" panose="020B0503020204020204" charset="-122"/>
               </a:rPr>
-              <a:t>基于表征压缩的频谱向量库存储</a:t>
+              <a:t>基于表征压缩的频谱向量数据库存储优化方法</a:t>
             </a:r>
             <a:endParaRPr lang="zh-CN" altLang="en-US" sz="1200" b="1" dirty="0">
               <a:solidFill>
@@ -4184,8 +4184,8 @@
         </p:nvSpPr>
         <p:spPr>
           <a:xfrm>
-            <a:off x="959735" y="3624665"/>
-            <a:ext cx="1914682" cy="275609"/>
+            <a:off x="959735" y="3524647"/>
+            <a:ext cx="1914682" cy="461665"/>
           </a:xfrm>
           <a:prstGeom prst="rect">
             <a:avLst/>
@@ -4213,7 +4213,7 @@
                 <a:latin typeface="微软雅黑" panose="020B0503020204020204" charset="-122"/>
                 <a:ea typeface="微软雅黑" panose="020B0503020204020204" charset="-122"/>
               </a:rPr>
-              <a:t>频谱数据价值评估</a:t>
+              <a:t>事件驱动的频谱数据价值评估模型</a:t>
             </a:r>
             <a:endParaRPr lang="zh-CN" altLang="en-US" sz="1200" b="1" dirty="0">
               <a:solidFill>
@@ -8463,8 +8463,8 @@
         </p:nvSpPr>
         <p:spPr>
           <a:xfrm>
-            <a:off x="5815581" y="5524133"/>
-            <a:ext cx="2049859" cy="275552"/>
+            <a:off x="5815581" y="5462214"/>
+            <a:ext cx="2313411" cy="461665"/>
           </a:xfrm>
           <a:prstGeom prst="rect">
             <a:avLst/>
@@ -8494,7 +8494,7 @@
                 <a:latin typeface="微软雅黑" panose="020B0503020204020204" charset="-122"/>
                 <a:ea typeface="微软雅黑" panose="020B0503020204020204" charset="-122"/>
               </a:rPr>
-              <a:t>可信协同决策</a:t>
+              <a:t>基于轻量安全传输与低延时确权的可信协同决策方法</a:t>
             </a:r>
           </a:p>
         </p:txBody>
@@ -8596,7 +8596,7 @@
                 <a:latin typeface="微软雅黑" panose="020B0503020204020204" charset="-122"/>
                 <a:ea typeface="微软雅黑" panose="020B0503020204020204" charset="-122"/>
               </a:rPr>
-              <a:t>基于混合专家模型的轻量化目标识别与轨迹分析</a:t>
+              <a:t>基于混合专家模型的轻量化目标检测与轨迹分析方法</a:t>
             </a:r>
             <a:endParaRPr lang="zh-CN" altLang="en-US" sz="1200" b="1" dirty="0">
               <a:solidFill>
@@ -8678,8 +8678,8 @@
         </p:nvSpPr>
         <p:spPr>
           <a:xfrm>
-            <a:off x="907161" y="5510332"/>
-            <a:ext cx="1937796" cy="275552"/>
+            <a:off x="969078" y="5429365"/>
+            <a:ext cx="2070476" cy="461665"/>
           </a:xfrm>
           <a:prstGeom prst="rect">
             <a:avLst/>
@@ -8698,14 +8698,14 @@
                 <a:latin typeface="微软雅黑" panose="020B0503020204020204" charset="-122"/>
                 <a:ea typeface="微软雅黑" panose="020B0503020204020204" charset="-122"/>
               </a:rPr>
-              <a:t>3.1</a:t>
+              <a:t>3.1 </a:t>
             </a:r>
             <a:r>
               <a:rPr lang="zh-CN" altLang="en-US" sz="1200" b="1" dirty="0">
                 <a:latin typeface="微软雅黑" panose="020B0503020204020204" charset="-122"/>
                 <a:ea typeface="微软雅黑" panose="020B0503020204020204" charset="-122"/>
               </a:rPr>
-              <a:t>频谱知识图谱构建</a:t>
+              <a:t>面向电磁态势的频谱知识图谱构建与动态演化方法</a:t>
             </a:r>
             <a:endParaRPr lang="zh-CN" altLang="en-US" sz="1200" b="1" dirty="0">
               <a:solidFill>
